--- a/knf/decks/d4p4.pptx
+++ b/knf/decks/d4p4.pptx
@@ -3783,7 +3783,7 @@
                 <a:ea typeface="Pretendard"/>
                 <a:cs typeface="Pretendard"/>
               </a:rPr>
-              <a:t>이 45분이 끝날 때 확인할 것</a:t>
+              <a:t>이 50분이 끝날 때 확인할 것</a:t>
             </a:r>
           </a:p>
         </p:txBody>
@@ -5506,7 +5506,7 @@
                 <a:ea typeface="Pretendard"/>
                 <a:cs typeface="Pretendard"/>
               </a:rPr>
-              <a:t>45분 뒤에는</a:t>
+              <a:t>50분 뒤에는</a:t>
             </a:r>
           </a:p>
         </p:txBody>

--- a/knf/decks/d4p4.pptx
+++ b/knf/decks/d4p4.pptx
@@ -3100,7 +3100,7 @@
       <p:grpSpPr/>
       <p:sp>
         <p:nvSpPr>
-          <p:cNvPr id="2" name="Oval 1"/>
+          <p:cNvPr id="2" name="deckgen:decor"/>
           <p:cNvSpPr/>
           <p:nvPr/>
         </p:nvSpPr>
@@ -3130,7 +3130,7 @@
       </p:sp>
       <p:sp>
         <p:nvSpPr>
-          <p:cNvPr id="3" name="Oval 2"/>
+          <p:cNvPr id="3" name="deckgen:decor"/>
           <p:cNvSpPr/>
           <p:nvPr/>
         </p:nvSpPr>
@@ -3160,7 +3160,7 @@
       </p:sp>
       <p:sp>
         <p:nvSpPr>
-          <p:cNvPr id="4" name="Oval 3"/>
+          <p:cNvPr id="4" name="deckgen:decor"/>
           <p:cNvSpPr/>
           <p:nvPr/>
         </p:nvSpPr>
@@ -3190,7 +3190,7 @@
       </p:sp>
       <p:sp>
         <p:nvSpPr>
-          <p:cNvPr id="5" name="Rectangle 4"/>
+          <p:cNvPr id="5" name="deckgen:decor"/>
           <p:cNvSpPr/>
           <p:nvPr/>
         </p:nvSpPr>
@@ -3220,7 +3220,7 @@
       </p:sp>
       <p:sp>
         <p:nvSpPr>
-          <p:cNvPr id="6" name="Oval 5"/>
+          <p:cNvPr id="6" name="deckgen:decor"/>
           <p:cNvSpPr/>
           <p:nvPr/>
         </p:nvSpPr>
@@ -3250,7 +3250,7 @@
       </p:sp>
       <p:sp>
         <p:nvSpPr>
-          <p:cNvPr id="7" name="Oval 6"/>
+          <p:cNvPr id="7" name="deckgen:decor"/>
           <p:cNvSpPr/>
           <p:nvPr/>
         </p:nvSpPr>
@@ -3280,7 +3280,7 @@
       </p:sp>
       <p:sp>
         <p:nvSpPr>
-          <p:cNvPr id="8" name="Oval 7"/>
+          <p:cNvPr id="8" name="deckgen:decor"/>
           <p:cNvSpPr/>
           <p:nvPr/>
         </p:nvSpPr>
@@ -3310,7 +3310,7 @@
       </p:sp>
       <p:sp>
         <p:nvSpPr>
-          <p:cNvPr id="9" name="Oval 8"/>
+          <p:cNvPr id="9" name="deckgen:decor"/>
           <p:cNvSpPr/>
           <p:nvPr/>
         </p:nvSpPr>
@@ -3340,7 +3340,7 @@
       </p:sp>
       <p:sp>
         <p:nvSpPr>
-          <p:cNvPr id="10" name="Rectangle 9"/>
+          <p:cNvPr id="10" name="deckgen:decor"/>
           <p:cNvSpPr/>
           <p:nvPr/>
         </p:nvSpPr>
@@ -3618,7 +3618,7 @@
       <p:grpSpPr/>
       <p:sp>
         <p:nvSpPr>
-          <p:cNvPr id="2" name="Oval 1"/>
+          <p:cNvPr id="2" name="deckgen:decor"/>
           <p:cNvSpPr/>
           <p:nvPr/>
         </p:nvSpPr>
@@ -3648,7 +3648,7 @@
       </p:sp>
       <p:sp>
         <p:nvSpPr>
-          <p:cNvPr id="3" name="Oval 2"/>
+          <p:cNvPr id="3" name="deckgen:decor"/>
           <p:cNvSpPr/>
           <p:nvPr/>
         </p:nvSpPr>
@@ -3678,7 +3678,7 @@
       </p:sp>
       <p:sp>
         <p:nvSpPr>
-          <p:cNvPr id="4" name="Oval 3"/>
+          <p:cNvPr id="4" name="deckgen:decor"/>
           <p:cNvSpPr/>
           <p:nvPr/>
         </p:nvSpPr>
@@ -4534,7 +4534,7 @@
       <p:grpSpPr/>
       <p:sp>
         <p:nvSpPr>
-          <p:cNvPr id="2" name="Oval 1"/>
+          <p:cNvPr id="2" name="deckgen:decor"/>
           <p:cNvSpPr/>
           <p:nvPr/>
         </p:nvSpPr>
@@ -4564,7 +4564,7 @@
       </p:sp>
       <p:sp>
         <p:nvSpPr>
-          <p:cNvPr id="3" name="Oval 2"/>
+          <p:cNvPr id="3" name="deckgen:decor"/>
           <p:cNvSpPr/>
           <p:nvPr/>
         </p:nvSpPr>
@@ -5341,7 +5341,7 @@
       <p:grpSpPr/>
       <p:sp>
         <p:nvSpPr>
-          <p:cNvPr id="2" name="Oval 1"/>
+          <p:cNvPr id="2" name="deckgen:decor"/>
           <p:cNvSpPr/>
           <p:nvPr/>
         </p:nvSpPr>
@@ -5371,7 +5371,7 @@
       </p:sp>
       <p:sp>
         <p:nvSpPr>
-          <p:cNvPr id="3" name="Oval 2"/>
+          <p:cNvPr id="3" name="deckgen:decor"/>
           <p:cNvSpPr/>
           <p:nvPr/>
         </p:nvSpPr>
@@ -5401,7 +5401,7 @@
       </p:sp>
       <p:sp>
         <p:nvSpPr>
-          <p:cNvPr id="4" name="Oval 3"/>
+          <p:cNvPr id="4" name="deckgen:decor"/>
           <p:cNvSpPr/>
           <p:nvPr/>
         </p:nvSpPr>
@@ -6186,7 +6186,7 @@
       <p:grpSpPr/>
       <p:sp>
         <p:nvSpPr>
-          <p:cNvPr id="2" name="Oval 1"/>
+          <p:cNvPr id="2" name="deckgen:decor"/>
           <p:cNvSpPr/>
           <p:nvPr/>
         </p:nvSpPr>
@@ -6216,7 +6216,7 @@
       </p:sp>
       <p:sp>
         <p:nvSpPr>
-          <p:cNvPr id="3" name="Oval 2"/>
+          <p:cNvPr id="3" name="deckgen:decor"/>
           <p:cNvSpPr/>
           <p:nvPr/>
         </p:nvSpPr>
@@ -6246,7 +6246,7 @@
       </p:sp>
       <p:sp>
         <p:nvSpPr>
-          <p:cNvPr id="4" name="Oval 3"/>
+          <p:cNvPr id="4" name="deckgen:decor"/>
           <p:cNvSpPr/>
           <p:nvPr/>
         </p:nvSpPr>
@@ -7135,7 +7135,7 @@
       <p:grpSpPr/>
       <p:sp>
         <p:nvSpPr>
-          <p:cNvPr id="2" name="Oval 1"/>
+          <p:cNvPr id="2" name="deckgen:decor"/>
           <p:cNvSpPr/>
           <p:nvPr/>
         </p:nvSpPr>
@@ -7165,7 +7165,7 @@
       </p:sp>
       <p:sp>
         <p:nvSpPr>
-          <p:cNvPr id="3" name="Oval 2"/>
+          <p:cNvPr id="3" name="deckgen:decor"/>
           <p:cNvSpPr/>
           <p:nvPr/>
         </p:nvSpPr>
@@ -7195,7 +7195,7 @@
       </p:sp>
       <p:sp>
         <p:nvSpPr>
-          <p:cNvPr id="4" name="Oval 3"/>
+          <p:cNvPr id="4" name="deckgen:decor"/>
           <p:cNvSpPr/>
           <p:nvPr/>
         </p:nvSpPr>
@@ -9592,7 +9592,7 @@
       <p:grpSpPr/>
       <p:sp>
         <p:nvSpPr>
-          <p:cNvPr id="2" name="Oval 1"/>
+          <p:cNvPr id="2" name="deckgen:decor"/>
           <p:cNvSpPr/>
           <p:nvPr/>
         </p:nvSpPr>
@@ -9622,7 +9622,7 @@
       </p:sp>
       <p:sp>
         <p:nvSpPr>
-          <p:cNvPr id="3" name="Oval 2"/>
+          <p:cNvPr id="3" name="deckgen:decor"/>
           <p:cNvSpPr/>
           <p:nvPr/>
         </p:nvSpPr>
@@ -9652,7 +9652,7 @@
       </p:sp>
       <p:sp>
         <p:nvSpPr>
-          <p:cNvPr id="4" name="Oval 3"/>
+          <p:cNvPr id="4" name="deckgen:decor"/>
           <p:cNvSpPr/>
           <p:nvPr/>
         </p:nvSpPr>
@@ -10619,7 +10619,7 @@
       <p:grpSpPr/>
       <p:sp>
         <p:nvSpPr>
-          <p:cNvPr id="2" name="Oval 1"/>
+          <p:cNvPr id="2" name="deckgen:decor"/>
           <p:cNvSpPr/>
           <p:nvPr/>
         </p:nvSpPr>
@@ -10649,7 +10649,7 @@
       </p:sp>
       <p:sp>
         <p:nvSpPr>
-          <p:cNvPr id="3" name="Oval 2"/>
+          <p:cNvPr id="3" name="deckgen:decor"/>
           <p:cNvSpPr/>
           <p:nvPr/>
         </p:nvSpPr>
@@ -10679,7 +10679,7 @@
       </p:sp>
       <p:sp>
         <p:nvSpPr>
-          <p:cNvPr id="4" name="Oval 3"/>
+          <p:cNvPr id="4" name="deckgen:decor"/>
           <p:cNvSpPr/>
           <p:nvPr/>
         </p:nvSpPr>
@@ -12555,7 +12555,7 @@
       <p:grpSpPr/>
       <p:sp>
         <p:nvSpPr>
-          <p:cNvPr id="2" name="Oval 1"/>
+          <p:cNvPr id="2" name="deckgen:decor"/>
           <p:cNvSpPr/>
           <p:nvPr/>
         </p:nvSpPr>
@@ -12585,7 +12585,7 @@
       </p:sp>
       <p:sp>
         <p:nvSpPr>
-          <p:cNvPr id="3" name="Oval 2"/>
+          <p:cNvPr id="3" name="deckgen:decor"/>
           <p:cNvSpPr/>
           <p:nvPr/>
         </p:nvSpPr>
@@ -12615,7 +12615,7 @@
       </p:sp>
       <p:sp>
         <p:nvSpPr>
-          <p:cNvPr id="4" name="Oval 3"/>
+          <p:cNvPr id="4" name="deckgen:decor"/>
           <p:cNvSpPr/>
           <p:nvPr/>
         </p:nvSpPr>
@@ -13591,7 +13591,7 @@
       <p:grpSpPr/>
       <p:sp>
         <p:nvSpPr>
-          <p:cNvPr id="2" name="Oval 1"/>
+          <p:cNvPr id="2" name="deckgen:decor"/>
           <p:cNvSpPr/>
           <p:nvPr/>
         </p:nvSpPr>
@@ -13621,7 +13621,7 @@
       </p:sp>
       <p:sp>
         <p:nvSpPr>
-          <p:cNvPr id="3" name="Oval 2"/>
+          <p:cNvPr id="3" name="deckgen:decor"/>
           <p:cNvSpPr/>
           <p:nvPr/>
         </p:nvSpPr>
@@ -13651,7 +13651,7 @@
       </p:sp>
       <p:sp>
         <p:nvSpPr>
-          <p:cNvPr id="4" name="Oval 3"/>
+          <p:cNvPr id="4" name="deckgen:decor"/>
           <p:cNvSpPr/>
           <p:nvPr/>
         </p:nvSpPr>
@@ -15444,7 +15444,7 @@
       <p:grpSpPr/>
       <p:sp>
         <p:nvSpPr>
-          <p:cNvPr id="2" name="Oval 1"/>
+          <p:cNvPr id="2" name="deckgen:decor"/>
           <p:cNvSpPr/>
           <p:nvPr/>
         </p:nvSpPr>
@@ -15474,7 +15474,7 @@
       </p:sp>
       <p:sp>
         <p:nvSpPr>
-          <p:cNvPr id="3" name="Oval 2"/>
+          <p:cNvPr id="3" name="deckgen:decor"/>
           <p:cNvSpPr/>
           <p:nvPr/>
         </p:nvSpPr>
@@ -15504,7 +15504,7 @@
       </p:sp>
       <p:sp>
         <p:nvSpPr>
-          <p:cNvPr id="4" name="Oval 3"/>
+          <p:cNvPr id="4" name="deckgen:decor"/>
           <p:cNvSpPr/>
           <p:nvPr/>
         </p:nvSpPr>
